--- a/slides/Lab - Biot-Savart Law.pptx
+++ b/slides/Lab - Biot-Savart Law.pptx
@@ -12,7 +12,7 @@
     <p:handoutMasterId r:id="rId7"/>
   </p:handoutMasterIdLst>
   <p:sldIdLst>
-    <p:sldId id="519" r:id="rId3"/>
+    <p:sldId id="1143" r:id="rId3"/>
     <p:sldId id="349" r:id="rId4"/>
     <p:sldId id="481" r:id="rId5"/>
   </p:sldIdLst>
@@ -203,7 +203,7 @@
           <a:p>
             <a:fld id="{A241AC98-512A-4A35-865E-757B6C1F07A2}" type="datetimeFigureOut">
               <a:rPr lang="en-US" smtClean="0"/>
-              <a:t>3/1/2022</a:t>
+              <a:t>3/3/2022</a:t>
             </a:fld>
             <a:endParaRPr lang="en-US"/>
           </a:p>
@@ -368,7 +368,7 @@
           <a:p>
             <a:fld id="{3854CEE7-15DE-41D9-8CA2-D1E137B1D850}" type="datetimeFigureOut">
               <a:rPr lang="en-US" smtClean="0"/>
-              <a:t>3/1/2022</a:t>
+              <a:t>3/3/2022</a:t>
             </a:fld>
             <a:endParaRPr lang="en-US"/>
           </a:p>
@@ -766,7 +766,7 @@
           <a:p>
             <a:fld id="{FDE33FF9-3C2E-4DC9-970F-A3A444D19E7F}" type="datetime1">
               <a:rPr lang="en-US" smtClean="0"/>
-              <a:t>3/1/2022</a:t>
+              <a:t>3/3/2022</a:t>
             </a:fld>
             <a:endParaRPr lang="en-US" dirty="0"/>
           </a:p>
@@ -936,7 +936,7 @@
           <a:p>
             <a:fld id="{A63AB46B-149A-4BAB-B65C-8DF4FCCC125D}" type="datetime1">
               <a:rPr lang="en-US" smtClean="0"/>
-              <a:t>3/1/2022</a:t>
+              <a:t>3/3/2022</a:t>
             </a:fld>
             <a:endParaRPr lang="en-US" dirty="0"/>
           </a:p>
@@ -1116,7 +1116,7 @@
           <a:p>
             <a:fld id="{05C2E057-40B5-4EA3-B7B1-62E50949E1BD}" type="datetime1">
               <a:rPr lang="en-US" smtClean="0"/>
-              <a:t>3/1/2022</a:t>
+              <a:t>3/3/2022</a:t>
             </a:fld>
             <a:endParaRPr lang="en-US" dirty="0"/>
           </a:p>
@@ -1308,7 +1308,7 @@
           <a:p>
             <a:fld id="{5555EB2C-244D-4423-AD97-018ED6478B87}" type="datetime1">
               <a:rPr lang="en-US" smtClean="0"/>
-              <a:t>3/1/2022</a:t>
+              <a:t>3/3/2022</a:t>
             </a:fld>
             <a:endParaRPr lang="en-US" dirty="0"/>
           </a:p>
@@ -1478,7 +1478,7 @@
           <a:p>
             <a:fld id="{A3CF632E-48CB-4EEB-A6B6-DEC7AD7CC976}" type="datetime1">
               <a:rPr lang="en-US" smtClean="0"/>
-              <a:t>3/1/2022</a:t>
+              <a:t>3/3/2022</a:t>
             </a:fld>
             <a:endParaRPr lang="en-US" dirty="0"/>
           </a:p>
@@ -1722,7 +1722,7 @@
           <a:p>
             <a:fld id="{BAEEE52C-3A57-458E-95F6-96B2FA9D1DD4}" type="datetime1">
               <a:rPr lang="en-US" smtClean="0"/>
-              <a:t>3/1/2022</a:t>
+              <a:t>3/3/2022</a:t>
             </a:fld>
             <a:endParaRPr lang="en-US" dirty="0"/>
           </a:p>
@@ -1954,7 +1954,7 @@
           <a:p>
             <a:fld id="{766FC747-A48A-4FF2-8EE4-3E95ECD1C2A8}" type="datetime1">
               <a:rPr lang="en-US" smtClean="0"/>
-              <a:t>3/1/2022</a:t>
+              <a:t>3/3/2022</a:t>
             </a:fld>
             <a:endParaRPr lang="en-US" dirty="0"/>
           </a:p>
@@ -2321,7 +2321,7 @@
           <a:p>
             <a:fld id="{C9BF5758-AB7F-463D-B638-E1729B95E126}" type="datetime1">
               <a:rPr lang="en-US" smtClean="0"/>
-              <a:t>3/1/2022</a:t>
+              <a:t>3/3/2022</a:t>
             </a:fld>
             <a:endParaRPr lang="en-US" dirty="0"/>
           </a:p>
@@ -2439,7 +2439,7 @@
           <a:p>
             <a:fld id="{F3718C77-7DD0-4738-BF52-D0EC9F78A76E}" type="datetime1">
               <a:rPr lang="en-US" smtClean="0"/>
-              <a:t>3/1/2022</a:t>
+              <a:t>3/3/2022</a:t>
             </a:fld>
             <a:endParaRPr lang="en-US" dirty="0"/>
           </a:p>
@@ -2534,7 +2534,7 @@
           <a:p>
             <a:fld id="{948970CF-13D9-4E1D-A74F-2CFE4953FCDB}" type="datetime1">
               <a:rPr lang="en-US" smtClean="0"/>
-              <a:t>3/1/2022</a:t>
+              <a:t>3/3/2022</a:t>
             </a:fld>
             <a:endParaRPr lang="en-US" dirty="0"/>
           </a:p>
@@ -2811,7 +2811,7 @@
           <a:p>
             <a:fld id="{F68C49B9-4E1C-4967-B9CF-0BF9FECBE837}" type="datetime1">
               <a:rPr lang="en-US" smtClean="0"/>
-              <a:t>3/1/2022</a:t>
+              <a:t>3/3/2022</a:t>
             </a:fld>
             <a:endParaRPr lang="en-US" dirty="0"/>
           </a:p>
@@ -2981,7 +2981,7 @@
           <a:p>
             <a:fld id="{CA21F7D3-8C79-4D31-A7B5-D4E802F39262}" type="datetime1">
               <a:rPr lang="en-US" smtClean="0"/>
-              <a:t>3/1/2022</a:t>
+              <a:t>3/3/2022</a:t>
             </a:fld>
             <a:endParaRPr lang="en-US" dirty="0"/>
           </a:p>
@@ -3237,7 +3237,7 @@
           <a:p>
             <a:fld id="{7E338CBB-1F06-4333-9BBF-66628B15E581}" type="datetime1">
               <a:rPr lang="en-US" smtClean="0"/>
-              <a:t>3/1/2022</a:t>
+              <a:t>3/3/2022</a:t>
             </a:fld>
             <a:endParaRPr lang="en-US" dirty="0"/>
           </a:p>
@@ -3407,7 +3407,7 @@
           <a:p>
             <a:fld id="{A2B41D1F-7576-4C60-B4EB-5115BC56CF40}" type="datetime1">
               <a:rPr lang="en-US" smtClean="0"/>
-              <a:t>3/1/2022</a:t>
+              <a:t>3/3/2022</a:t>
             </a:fld>
             <a:endParaRPr lang="en-US" dirty="0"/>
           </a:p>
@@ -3587,7 +3587,7 @@
           <a:p>
             <a:fld id="{E79D1398-4D56-44F9-BA35-34ACF3159A64}" type="datetime1">
               <a:rPr lang="en-US" smtClean="0"/>
-              <a:t>3/1/2022</a:t>
+              <a:t>3/3/2022</a:t>
             </a:fld>
             <a:endParaRPr lang="en-US" dirty="0"/>
           </a:p>
@@ -3831,7 +3831,7 @@
           <a:p>
             <a:fld id="{1B1145D9-2241-45AB-BAB4-01FEEB0B6642}" type="datetime1">
               <a:rPr lang="en-US" smtClean="0"/>
-              <a:t>3/1/2022</a:t>
+              <a:t>3/3/2022</a:t>
             </a:fld>
             <a:endParaRPr lang="en-US" dirty="0"/>
           </a:p>
@@ -4063,7 +4063,7 @@
           <a:p>
             <a:fld id="{4555087E-9206-4668-9B18-C5B9EBEEA3B0}" type="datetime1">
               <a:rPr lang="en-US" smtClean="0"/>
-              <a:t>3/1/2022</a:t>
+              <a:t>3/3/2022</a:t>
             </a:fld>
             <a:endParaRPr lang="en-US" dirty="0"/>
           </a:p>
@@ -4430,7 +4430,7 @@
           <a:p>
             <a:fld id="{BCE636D3-65F7-4C44-A796-7BD2974EF670}" type="datetime1">
               <a:rPr lang="en-US" smtClean="0"/>
-              <a:t>3/1/2022</a:t>
+              <a:t>3/3/2022</a:t>
             </a:fld>
             <a:endParaRPr lang="en-US" dirty="0"/>
           </a:p>
@@ -4548,7 +4548,7 @@
           <a:p>
             <a:fld id="{9A237276-138E-4C00-B0F9-A075085EB4BB}" type="datetime1">
               <a:rPr lang="en-US" smtClean="0"/>
-              <a:t>3/1/2022</a:t>
+              <a:t>3/3/2022</a:t>
             </a:fld>
             <a:endParaRPr lang="en-US" dirty="0"/>
           </a:p>
@@ -4643,7 +4643,7 @@
           <a:p>
             <a:fld id="{D42FC897-058E-4204-A28B-A7115860C98C}" type="datetime1">
               <a:rPr lang="en-US" smtClean="0"/>
-              <a:t>3/1/2022</a:t>
+              <a:t>3/3/2022</a:t>
             </a:fld>
             <a:endParaRPr lang="en-US" dirty="0"/>
           </a:p>
@@ -4920,7 +4920,7 @@
           <a:p>
             <a:fld id="{AC47F489-1163-468A-8BB8-B38D60E5D5F0}" type="datetime1">
               <a:rPr lang="en-US" smtClean="0"/>
-              <a:t>3/1/2022</a:t>
+              <a:t>3/3/2022</a:t>
             </a:fld>
             <a:endParaRPr lang="en-US" dirty="0"/>
           </a:p>
@@ -5176,7 +5176,7 @@
           <a:p>
             <a:fld id="{F2E511F9-2A02-4B6A-9841-1A9622323699}" type="datetime1">
               <a:rPr lang="en-US" smtClean="0"/>
-              <a:t>3/1/2022</a:t>
+              <a:t>3/3/2022</a:t>
             </a:fld>
             <a:endParaRPr lang="en-US" dirty="0"/>
           </a:p>
@@ -5389,7 +5389,7 @@
           <a:p>
             <a:fld id="{47C04F80-52E9-40D2-BFD8-F4600958E494}" type="datetime1">
               <a:rPr lang="en-US" smtClean="0"/>
-              <a:t>3/1/2022</a:t>
+              <a:t>3/3/2022</a:t>
             </a:fld>
             <a:endParaRPr lang="en-US" dirty="0"/>
           </a:p>
@@ -5930,7 +5930,7 @@
           <a:p>
             <a:fld id="{705EC883-F03C-4CA3-AF62-BEF30EEA4F65}" type="datetime1">
               <a:rPr lang="en-US" smtClean="0"/>
-              <a:t>3/1/2022</a:t>
+              <a:t>3/3/2022</a:t>
             </a:fld>
             <a:endParaRPr lang="en-US" dirty="0"/>
           </a:p>
@@ -6335,6 +6335,110 @@
           <a:chExt cx="0" cy="0"/>
         </a:xfrm>
       </p:grpSpPr>
+      <p:pic>
+        <p:nvPicPr>
+          <p:cNvPr id="19" name="Picture 18">
+            <a:extLst>
+              <a:ext uri="{FF2B5EF4-FFF2-40B4-BE49-F238E27FC236}">
+                <a16:creationId xmlns:a16="http://schemas.microsoft.com/office/drawing/2014/main" id="{17C2B5E5-FA39-488F-AB21-780CCEC9629C}"/>
+              </a:ext>
+            </a:extLst>
+          </p:cNvPr>
+          <p:cNvPicPr>
+            <a:picLocks noChangeAspect="1"/>
+          </p:cNvPicPr>
+          <p:nvPr/>
+        </p:nvPicPr>
+        <p:blipFill rotWithShape="1">
+          <a:blip r:embed="rId2" cstate="screen">
+            <a:extLst>
+              <a:ext uri="{28A0092B-C50C-407E-A947-70E740481C1C}">
+                <a14:useLocalDpi xmlns:a14="http://schemas.microsoft.com/office/drawing/2010/main"/>
+              </a:ext>
+            </a:extLst>
+          </a:blip>
+          <a:srcRect/>
+          <a:stretch/>
+        </p:blipFill>
+        <p:spPr>
+          <a:xfrm rot="5400000">
+            <a:off x="218595" y="3116578"/>
+            <a:ext cx="2055976" cy="1002507"/>
+          </a:xfrm>
+          <a:prstGeom prst="rect">
+            <a:avLst/>
+          </a:prstGeom>
+        </p:spPr>
+      </p:pic>
+      <p:pic>
+        <p:nvPicPr>
+          <p:cNvPr id="3" name="Picture 2">
+            <a:extLst>
+              <a:ext uri="{FF2B5EF4-FFF2-40B4-BE49-F238E27FC236}">
+                <a16:creationId xmlns:a16="http://schemas.microsoft.com/office/drawing/2014/main" id="{68022AA9-25C0-416F-AD81-E38CA0BC3B7D}"/>
+              </a:ext>
+            </a:extLst>
+          </p:cNvPr>
+          <p:cNvPicPr>
+            <a:picLocks noChangeAspect="1"/>
+          </p:cNvPicPr>
+          <p:nvPr/>
+        </p:nvPicPr>
+        <p:blipFill>
+          <a:blip r:embed="rId3"/>
+          <a:stretch>
+            <a:fillRect/>
+          </a:stretch>
+        </p:blipFill>
+        <p:spPr>
+          <a:xfrm>
+            <a:off x="4137500" y="4895616"/>
+            <a:ext cx="2191062" cy="1643297"/>
+          </a:xfrm>
+          <a:prstGeom prst="rect">
+            <a:avLst/>
+          </a:prstGeom>
+        </p:spPr>
+      </p:pic>
+      <p:pic>
+        <p:nvPicPr>
+          <p:cNvPr id="4" name="Picture 3">
+            <a:extLst>
+              <a:ext uri="{FF2B5EF4-FFF2-40B4-BE49-F238E27FC236}">
+                <a16:creationId xmlns:a16="http://schemas.microsoft.com/office/drawing/2014/main" id="{C58DDF2C-2EBB-45B4-B100-C8780377068C}"/>
+              </a:ext>
+            </a:extLst>
+          </p:cNvPr>
+          <p:cNvPicPr>
+            <a:picLocks noChangeAspect="1"/>
+          </p:cNvPicPr>
+          <p:nvPr/>
+        </p:nvPicPr>
+        <p:blipFill>
+          <a:blip r:embed="rId4" cstate="print">
+            <a:extLst>
+              <a:ext uri="{28A0092B-C50C-407E-A947-70E740481C1C}">
+                <a14:useLocalDpi xmlns:a14="http://schemas.microsoft.com/office/drawing/2010/main"/>
+              </a:ext>
+            </a:extLst>
+          </a:blip>
+          <a:stretch>
+            <a:fillRect/>
+          </a:stretch>
+        </p:blipFill>
+        <p:spPr>
+          <a:xfrm>
+            <a:off x="179683" y="899099"/>
+            <a:ext cx="2127777" cy="1409652"/>
+          </a:xfrm>
+          <a:prstGeom prst="rect">
+            <a:avLst/>
+          </a:prstGeom>
+          <a:ln>
+            <a:noFill/>
+          </a:ln>
+        </p:spPr>
+      </p:pic>
       <p:sp>
         <p:nvSpPr>
           <p:cNvPr id="5" name="Slide Number Placeholder 4"/>
@@ -6463,7 +6567,7 @@
                 <a:latin typeface="Calibri" panose="020F0502020204030204"/>
                 <a:ea typeface="+mn-ea"/>
                 <a:cs typeface="+mn-cs"/>
-                <a:hlinkClick r:id="rId2"/>
+                <a:hlinkClick r:id="rId5"/>
               </a:rPr>
               <a:t>dbiersach@bnl.gov</a:t>
             </a:r>
@@ -6493,7 +6597,7 @@
         <p:spPr>
           <a:xfrm>
             <a:off x="6077647" y="899099"/>
-            <a:ext cx="2818005" cy="1200329"/>
+            <a:ext cx="2653765" cy="1200329"/>
           </a:xfrm>
           <a:prstGeom prst="rect">
             <a:avLst/>
@@ -6538,7 +6642,7 @@
                 <a:ea typeface="+mn-ea"/>
                 <a:cs typeface="+mn-cs"/>
               </a:rPr>
-              <a:t>BNL 201</a:t>
+              <a:t>Scientific Computing</a:t>
             </a:r>
           </a:p>
           <a:p>
@@ -6560,58 +6664,28 @@
               <a:defRPr/>
             </a:pPr>
             <a:r>
-              <a:rPr kumimoji="0" lang="en-US" sz="2400" b="1" i="0" u="none" strike="noStrike" kern="1200" cap="none" spc="0" normalizeH="0" baseline="0" noProof="0" dirty="0">
-                <a:ln>
-                  <a:noFill/>
-                </a:ln>
+              <a:rPr lang="en-US" sz="2400" b="1" dirty="0">
                 <a:solidFill>
                   <a:prstClr val="black"/>
                 </a:solidFill>
-                <a:effectLst/>
-                <a:uLnTx/>
-                <a:uFillTx/>
                 <a:latin typeface="Calibri" panose="020F0502020204030204"/>
-                <a:ea typeface="+mn-ea"/>
-                <a:cs typeface="+mn-cs"/>
               </a:rPr>
-              <a:t>Computational</a:t>
-            </a:r>
-          </a:p>
-          <a:p>
-            <a:pPr marL="0" marR="0" lvl="0" indent="0" algn="ctr" defTabSz="914400" rtl="0" eaLnBrk="1" fontAlgn="auto" latinLnBrk="0" hangingPunct="1">
-              <a:lnSpc>
-                <a:spcPct val="100000"/>
-              </a:lnSpc>
-              <a:spcBef>
-                <a:spcPts val="0"/>
-              </a:spcBef>
-              <a:spcAft>
-                <a:spcPts val="0"/>
-              </a:spcAft>
-              <a:buClrTx/>
-              <a:buSzTx/>
-              <a:buFontTx/>
-              <a:buNone/>
-              <a:tabLst/>
-              <a:defRPr/>
-            </a:pPr>
-            <a:r>
-              <a:rPr kumimoji="0" lang="en-US" sz="2400" b="1" i="0" u="none" strike="noStrike" kern="1200" cap="none" spc="0" normalizeH="0" baseline="0" noProof="0" dirty="0">
-                <a:ln>
-                  <a:noFill/>
-                </a:ln>
-                <a:solidFill>
-                  <a:prstClr val="black"/>
-                </a:solidFill>
-                <a:effectLst/>
-                <a:uLnTx/>
-                <a:uFillTx/>
-                <a:latin typeface="Calibri" panose="020F0502020204030204"/>
-                <a:ea typeface="+mn-ea"/>
-                <a:cs typeface="+mn-cs"/>
-              </a:rPr>
-              <a:t>Physics</a:t>
-            </a:r>
+              <a:t>Demonstrations</a:t>
+            </a:r>
+            <a:endParaRPr kumimoji="0" lang="en-US" sz="2400" b="1" i="0" u="none" strike="noStrike" kern="1200" cap="none" spc="0" normalizeH="0" baseline="0" noProof="0" dirty="0">
+              <a:ln>
+                <a:noFill/>
+              </a:ln>
+              <a:solidFill>
+                <a:prstClr val="black"/>
+              </a:solidFill>
+              <a:effectLst/>
+              <a:uLnTx/>
+              <a:uFillTx/>
+              <a:latin typeface="Calibri" panose="020F0502020204030204"/>
+              <a:ea typeface="+mn-ea"/>
+              <a:cs typeface="+mn-cs"/>
+            </a:endParaRPr>
           </a:p>
         </p:txBody>
       </p:sp>
@@ -6705,8 +6779,8 @@
         </p:nvSpPr>
         <p:spPr>
           <a:xfrm>
-            <a:off x="6241886" y="2499995"/>
-            <a:ext cx="2489526" cy="1015663"/>
+            <a:off x="6391478" y="2470473"/>
+            <a:ext cx="2190341" cy="1015663"/>
           </a:xfrm>
           <a:prstGeom prst="rect">
             <a:avLst/>
@@ -6751,7 +6825,7 @@
                 <a:ea typeface="+mn-ea"/>
                 <a:cs typeface="+mn-cs"/>
               </a:rPr>
-              <a:t>Using </a:t>
+              <a:t>Using Python on a </a:t>
             </a:r>
             <a:r>
               <a:rPr kumimoji="0" lang="en-US" sz="2000" b="1" i="0" u="none" strike="noStrike" kern="1200" cap="none" spc="0" normalizeH="0" baseline="0" noProof="0" dirty="0">
@@ -6768,7 +6842,7 @@
                 <a:ea typeface="+mn-ea"/>
                 <a:cs typeface="+mn-cs"/>
               </a:rPr>
-              <a:t>Python</a:t>
+              <a:t>Microcontroller </a:t>
             </a:r>
             <a:r>
               <a:rPr kumimoji="0" lang="en-US" sz="2000" b="0" i="0" u="none" strike="noStrike" kern="1200" cap="none" spc="0" normalizeH="0" baseline="0" noProof="0" dirty="0">
@@ -6785,14 +6859,23 @@
                 <a:ea typeface="+mn-ea"/>
                 <a:cs typeface="+mn-cs"/>
               </a:rPr>
-              <a:t> with Arduino &amp; Raspberry Pi Devices</a:t>
-            </a:r>
-            <a:endParaRPr kumimoji="0" lang="en-US" sz="2000" b="1" i="0" u="none" strike="noStrike" kern="1200" cap="none" spc="0" normalizeH="0" baseline="0" noProof="0" dirty="0">
+              <a:t>with</a:t>
+            </a:r>
+            <a:r>
+              <a:rPr lang="en-US" sz="2000" b="1" dirty="0">
+                <a:solidFill>
+                  <a:srgbClr val="FF0000"/>
+                </a:solidFill>
+                <a:latin typeface="Calibri" panose="020F0502020204030204"/>
+              </a:rPr>
+              <a:t> Sensors</a:t>
+            </a:r>
+            <a:endParaRPr kumimoji="0" lang="en-US" sz="2000" b="0" i="0" u="none" strike="noStrike" kern="1200" cap="none" spc="0" normalizeH="0" baseline="0" noProof="0" dirty="0">
               <a:ln>
                 <a:noFill/>
               </a:ln>
               <a:solidFill>
-                <a:srgbClr val="FF0000"/>
+                <a:prstClr val="black"/>
               </a:solidFill>
               <a:effectLst/>
               <a:uLnTx/>
@@ -6804,42 +6887,6 @@
           </a:p>
         </p:txBody>
       </p:sp>
-      <p:pic>
-        <p:nvPicPr>
-          <p:cNvPr id="13" name="Picture 12">
-            <a:extLst>
-              <a:ext uri="{FF2B5EF4-FFF2-40B4-BE49-F238E27FC236}">
-                <a16:creationId xmlns:a16="http://schemas.microsoft.com/office/drawing/2014/main" id="{96B81BFE-6EE6-4CFA-B458-7FF5D8607A84}"/>
-              </a:ext>
-            </a:extLst>
-          </p:cNvPr>
-          <p:cNvPicPr>
-            <a:picLocks noChangeAspect="1"/>
-          </p:cNvPicPr>
-          <p:nvPr/>
-        </p:nvPicPr>
-        <p:blipFill>
-          <a:blip r:embed="rId3" cstate="screen">
-            <a:extLst>
-              <a:ext uri="{28A0092B-C50C-407E-A947-70E740481C1C}">
-                <a14:useLocalDpi xmlns:a14="http://schemas.microsoft.com/office/drawing/2010/main"/>
-              </a:ext>
-            </a:extLst>
-          </a:blip>
-          <a:stretch>
-            <a:fillRect/>
-          </a:stretch>
-        </p:blipFill>
-        <p:spPr>
-          <a:xfrm>
-            <a:off x="197598" y="908752"/>
-            <a:ext cx="2109862" cy="1409652"/>
-          </a:xfrm>
-          <a:prstGeom prst="rect">
-            <a:avLst/>
-          </a:prstGeom>
-        </p:spPr>
-      </p:pic>
       <p:pic>
         <p:nvPicPr>
           <p:cNvPr id="14" name="Picture 13">
@@ -6855,7 +6902,7 @@
           <p:nvPr/>
         </p:nvPicPr>
         <p:blipFill>
-          <a:blip r:embed="rId4" cstate="screen">
+          <a:blip r:embed="rId6" cstate="screen">
             <a:extLst>
               <a:ext uri="{28A0092B-C50C-407E-A947-70E740481C1C}">
                 <a14:useLocalDpi xmlns:a14="http://schemas.microsoft.com/office/drawing/2010/main"/>
@@ -6868,7 +6915,7 @@
         </p:blipFill>
         <p:spPr>
           <a:xfrm>
-            <a:off x="247878" y="4915158"/>
+            <a:off x="281623" y="4886637"/>
             <a:ext cx="1923894" cy="1726798"/>
           </a:xfrm>
           <a:prstGeom prst="rect">
@@ -6891,7 +6938,7 @@
           <p:nvPr/>
         </p:nvPicPr>
         <p:blipFill>
-          <a:blip r:embed="rId5" cstate="screen">
+          <a:blip r:embed="rId7" cstate="screen">
             <a:extLst>
               <a:ext uri="{28A0092B-C50C-407E-A947-70E740481C1C}">
                 <a14:useLocalDpi xmlns:a14="http://schemas.microsoft.com/office/drawing/2010/main"/>
@@ -6927,7 +6974,7 @@
           <p:nvPr/>
         </p:nvPicPr>
         <p:blipFill>
-          <a:blip r:embed="rId6" cstate="screen">
+          <a:blip r:embed="rId8" cstate="screen">
             <a:extLst>
               <a:ext uri="{28A0092B-C50C-407E-A947-70E740481C1C}">
                 <a14:useLocalDpi xmlns:a14="http://schemas.microsoft.com/office/drawing/2010/main"/>
@@ -6963,7 +7010,7 @@
           <p:nvPr/>
         </p:nvPicPr>
         <p:blipFill rotWithShape="1">
-          <a:blip r:embed="rId7" cstate="screen">
+          <a:blip r:embed="rId9" cstate="screen">
             <a:extLst>
               <a:ext uri="{28A0092B-C50C-407E-A947-70E740481C1C}">
                 <a14:useLocalDpi xmlns:a14="http://schemas.microsoft.com/office/drawing/2010/main"/>
@@ -6985,41 +7032,6 @@
       </p:pic>
       <p:pic>
         <p:nvPicPr>
-          <p:cNvPr id="18" name="Picture 17">
-            <a:extLst>
-              <a:ext uri="{FF2B5EF4-FFF2-40B4-BE49-F238E27FC236}">
-                <a16:creationId xmlns:a16="http://schemas.microsoft.com/office/drawing/2014/main" id="{44F76569-9854-4CE9-A5E1-2DA0748FFC10}"/>
-              </a:ext>
-            </a:extLst>
-          </p:cNvPr>
-          <p:cNvPicPr>
-            <a:picLocks noChangeAspect="1"/>
-          </p:cNvPicPr>
-          <p:nvPr/>
-        </p:nvPicPr>
-        <p:blipFill rotWithShape="1">
-          <a:blip r:embed="rId8" cstate="screen">
-            <a:extLst>
-              <a:ext uri="{28A0092B-C50C-407E-A947-70E740481C1C}">
-                <a14:useLocalDpi xmlns:a14="http://schemas.microsoft.com/office/drawing/2010/main"/>
-              </a:ext>
-            </a:extLst>
-          </a:blip>
-          <a:srcRect/>
-          <a:stretch/>
-        </p:blipFill>
-        <p:spPr>
-          <a:xfrm>
-            <a:off x="379658" y="2520257"/>
-            <a:ext cx="1635380" cy="2213117"/>
-          </a:xfrm>
-          <a:prstGeom prst="rect">
-            <a:avLst/>
-          </a:prstGeom>
-        </p:spPr>
-      </p:pic>
-      <p:pic>
-        <p:nvPicPr>
           <p:cNvPr id="6" name="Picture 5">
             <a:extLst>
               <a:ext uri="{FF2B5EF4-FFF2-40B4-BE49-F238E27FC236}">
@@ -7033,7 +7045,7 @@
           <p:nvPr/>
         </p:nvPicPr>
         <p:blipFill>
-          <a:blip r:embed="rId9" cstate="screen">
+          <a:blip r:embed="rId10" cstate="screen">
             <a:extLst>
               <a:ext uri="{28A0092B-C50C-407E-A947-70E740481C1C}">
                 <a14:useLocalDpi xmlns:a14="http://schemas.microsoft.com/office/drawing/2010/main"/>
@@ -7054,40 +7066,10 @@
           </a:prstGeom>
         </p:spPr>
       </p:pic>
-      <p:pic>
-        <p:nvPicPr>
-          <p:cNvPr id="8" name="Picture 7">
-            <a:extLst>
-              <a:ext uri="{FF2B5EF4-FFF2-40B4-BE49-F238E27FC236}">
-                <a16:creationId xmlns:a16="http://schemas.microsoft.com/office/drawing/2014/main" id="{03050056-A596-4129-83FF-B91E634FAB07}"/>
-              </a:ext>
-            </a:extLst>
-          </p:cNvPr>
-          <p:cNvPicPr>
-            <a:picLocks noChangeAspect="1"/>
-          </p:cNvPicPr>
-          <p:nvPr/>
-        </p:nvPicPr>
-        <p:blipFill>
-          <a:blip r:embed="rId10"/>
-          <a:stretch>
-            <a:fillRect/>
-          </a:stretch>
-        </p:blipFill>
-        <p:spPr>
-          <a:xfrm>
-            <a:off x="4515323" y="4877552"/>
-            <a:ext cx="1435416" cy="1661361"/>
-          </a:xfrm>
-          <a:prstGeom prst="rect">
-            <a:avLst/>
-          </a:prstGeom>
-        </p:spPr>
-      </p:pic>
     </p:spTree>
     <p:extLst>
       <p:ext uri="{BB962C8B-B14F-4D97-AF65-F5344CB8AC3E}">
-        <p14:creationId xmlns:p14="http://schemas.microsoft.com/office/powerpoint/2010/main" val="1404834773"/>
+        <p14:creationId xmlns:p14="http://schemas.microsoft.com/office/powerpoint/2010/main" val="1210668413"/>
       </p:ext>
     </p:extLst>
   </p:cSld>
